--- a/IoT Academic Poster.pptx
+++ b/IoT Academic Poster.pptx
@@ -512,7 +512,7 @@
           <a:p>
             <a:fld id="{846CE7D5-CF57-46EF-B807-FDD0502418D4}" type="datetimeFigureOut">
               <a:rPr lang="en-GB" smtClean="0"/>
-              <a:t>15/04/2026</a:t>
+              <a:t>23/04/2026</a:t>
             </a:fld>
             <a:endParaRPr lang="en-GB"/>
           </a:p>
@@ -682,7 +682,7 @@
           <a:p>
             <a:fld id="{846CE7D5-CF57-46EF-B807-FDD0502418D4}" type="datetimeFigureOut">
               <a:rPr lang="en-GB" smtClean="0"/>
-              <a:t>15/04/2026</a:t>
+              <a:t>23/04/2026</a:t>
             </a:fld>
             <a:endParaRPr lang="en-GB"/>
           </a:p>
@@ -862,7 +862,7 @@
           <a:p>
             <a:fld id="{846CE7D5-CF57-46EF-B807-FDD0502418D4}" type="datetimeFigureOut">
               <a:rPr lang="en-GB" smtClean="0"/>
-              <a:t>15/04/2026</a:t>
+              <a:t>23/04/2026</a:t>
             </a:fld>
             <a:endParaRPr lang="en-GB"/>
           </a:p>
@@ -1032,7 +1032,7 @@
           <a:p>
             <a:fld id="{846CE7D5-CF57-46EF-B807-FDD0502418D4}" type="datetimeFigureOut">
               <a:rPr lang="en-GB" smtClean="0"/>
-              <a:t>15/04/2026</a:t>
+              <a:t>23/04/2026</a:t>
             </a:fld>
             <a:endParaRPr lang="en-GB"/>
           </a:p>
@@ -1278,7 +1278,7 @@
           <a:p>
             <a:fld id="{846CE7D5-CF57-46EF-B807-FDD0502418D4}" type="datetimeFigureOut">
               <a:rPr lang="en-GB" smtClean="0"/>
-              <a:t>15/04/2026</a:t>
+              <a:t>23/04/2026</a:t>
             </a:fld>
             <a:endParaRPr lang="en-GB"/>
           </a:p>
@@ -1510,7 +1510,7 @@
           <a:p>
             <a:fld id="{846CE7D5-CF57-46EF-B807-FDD0502418D4}" type="datetimeFigureOut">
               <a:rPr lang="en-GB" smtClean="0"/>
-              <a:t>15/04/2026</a:t>
+              <a:t>23/04/2026</a:t>
             </a:fld>
             <a:endParaRPr lang="en-GB"/>
           </a:p>
@@ -1877,7 +1877,7 @@
           <a:p>
             <a:fld id="{846CE7D5-CF57-46EF-B807-FDD0502418D4}" type="datetimeFigureOut">
               <a:rPr lang="en-GB" smtClean="0"/>
-              <a:t>15/04/2026</a:t>
+              <a:t>23/04/2026</a:t>
             </a:fld>
             <a:endParaRPr lang="en-GB"/>
           </a:p>
@@ -1995,7 +1995,7 @@
           <a:p>
             <a:fld id="{846CE7D5-CF57-46EF-B807-FDD0502418D4}" type="datetimeFigureOut">
               <a:rPr lang="en-GB" smtClean="0"/>
-              <a:t>15/04/2026</a:t>
+              <a:t>23/04/2026</a:t>
             </a:fld>
             <a:endParaRPr lang="en-GB"/>
           </a:p>
@@ -2090,7 +2090,7 @@
           <a:p>
             <a:fld id="{846CE7D5-CF57-46EF-B807-FDD0502418D4}" type="datetimeFigureOut">
               <a:rPr lang="en-GB" smtClean="0"/>
-              <a:t>15/04/2026</a:t>
+              <a:t>23/04/2026</a:t>
             </a:fld>
             <a:endParaRPr lang="en-GB"/>
           </a:p>
@@ -2367,7 +2367,7 @@
           <a:p>
             <a:fld id="{846CE7D5-CF57-46EF-B807-FDD0502418D4}" type="datetimeFigureOut">
               <a:rPr lang="en-GB" smtClean="0"/>
-              <a:t>15/04/2026</a:t>
+              <a:t>23/04/2026</a:t>
             </a:fld>
             <a:endParaRPr lang="en-GB"/>
           </a:p>
@@ -2624,7 +2624,7 @@
           <a:p>
             <a:fld id="{846CE7D5-CF57-46EF-B807-FDD0502418D4}" type="datetimeFigureOut">
               <a:rPr lang="en-GB" smtClean="0"/>
-              <a:t>15/04/2026</a:t>
+              <a:t>23/04/2026</a:t>
             </a:fld>
             <a:endParaRPr lang="en-GB"/>
           </a:p>
@@ -2837,7 +2837,7 @@
           <a:p>
             <a:fld id="{846CE7D5-CF57-46EF-B807-FDD0502418D4}" type="datetimeFigureOut">
               <a:rPr lang="en-GB" smtClean="0"/>
-              <a:t>15/04/2026</a:t>
+              <a:t>23/04/2026</a:t>
             </a:fld>
             <a:endParaRPr lang="en-GB"/>
           </a:p>
@@ -4313,6 +4313,36 @@
           </a:p>
         </p:txBody>
       </p:sp>
+      <p:pic>
+        <p:nvPicPr>
+          <p:cNvPr id="27" name="Picture 26">
+            <a:extLst>
+              <a:ext uri="{FF2B5EF4-FFF2-40B4-BE49-F238E27FC236}">
+                <a16:creationId xmlns:a16="http://schemas.microsoft.com/office/drawing/2014/main" id="{997A3492-DA22-B8A3-1A6B-49E7EE917912}"/>
+              </a:ext>
+            </a:extLst>
+          </p:cNvPr>
+          <p:cNvPicPr>
+            <a:picLocks noChangeAspect="1"/>
+          </p:cNvPicPr>
+          <p:nvPr/>
+        </p:nvPicPr>
+        <p:blipFill>
+          <a:blip r:embed="rId6"/>
+          <a:stretch>
+            <a:fillRect/>
+          </a:stretch>
+        </p:blipFill>
+        <p:spPr>
+          <a:xfrm>
+            <a:off x="3052278" y="5003593"/>
+            <a:ext cx="2736571" cy="1515431"/>
+          </a:xfrm>
+          <a:prstGeom prst="rect">
+            <a:avLst/>
+          </a:prstGeom>
+        </p:spPr>
+      </p:pic>
     </p:spTree>
     <p:extLst>
       <p:ext uri="{BB962C8B-B14F-4D97-AF65-F5344CB8AC3E}">
